--- a/sessions/QuickKart_SemiStructured_Unstructured_Deck.pptx
+++ b/sessions/QuickKart_SemiStructured_Unstructured_Deck.pptx
@@ -1959,7 +1959,7 @@
                 <a:ea typeface="Cambria" pitchFamily="34" charset="-122"/>
                 <a:cs typeface="Cambria" pitchFamily="34" charset="-120"/>
               </a:rPr>
-              <a:t>Semi-Structured &amp; Unstructured Data</a:t>
+              <a:t>Semi-Structured &amp; Unstructured Data </a:t>
             </a:r>
             <a:endParaRPr lang="en-US" sz="4200" dirty="0"/>
           </a:p>
@@ -2098,17 +2098,6 @@
               </a:lnSpc>
               <a:buNone/>
             </a:pPr>
-            <a:r>
-              <a:rPr lang="en-US" sz="1500" dirty="0">
-                <a:solidFill>
-                  <a:srgbClr val="93A8C0"/>
-                </a:solidFill>
-                <a:latin typeface="Calibri" pitchFamily="34" charset="0"/>
-                <a:ea typeface="Calibri" pitchFamily="34" charset="-122"/>
-                <a:cs typeface="Calibri" pitchFamily="34" charset="-120"/>
-              </a:rPr>
-              <a:t>Instructor: Abhishek</a:t>
-            </a:r>
             <a:endParaRPr lang="en-US" sz="1500" dirty="0"/>
           </a:p>
         </p:txBody>
